--- a/assets/powerpoints/module-n2-autobus/B1-tout-droit-a-droite-a-gauche.pptx
+++ b/assets/powerpoints/module-n2-autobus/B1-tout-droit-a-droite-a-gauche.pptx
@@ -9817,7 +9817,61 @@
                 </a:solidFill>
                 <a:latin typeface="Verdana"/>
               </a:rPr>
-              <a:t>jusqu'&lt;b&gt;au&lt;/b&gt; feu (masculin) · jusqu'&lt;b&gt;à la&lt;/b&gt; pharmacie (féminin) · jusqu'&lt;b&gt;à l'&lt;/b&gt;école (voyelle).</a:t>
+              <a:t>jusqu'</a:t>
+            </a:r>
+            <a:r>
+              <a:rPr sz="2000" b="1" i="0">
+                <a:solidFill>
+                  <a:srgbClr val="4B4F52"/>
+                </a:solidFill>
+                <a:latin typeface="Verdana"/>
+              </a:rPr>
+              <a:t>au</a:t>
+            </a:r>
+            <a:r>
+              <a:rPr sz="2000" b="0" i="0">
+                <a:solidFill>
+                  <a:srgbClr val="4B4F52"/>
+                </a:solidFill>
+                <a:latin typeface="Verdana"/>
+              </a:rPr>
+              <a:t> feu (masculin) · jusqu'</a:t>
+            </a:r>
+            <a:r>
+              <a:rPr sz="2000" b="1" i="0">
+                <a:solidFill>
+                  <a:srgbClr val="4B4F52"/>
+                </a:solidFill>
+                <a:latin typeface="Verdana"/>
+              </a:rPr>
+              <a:t>à la</a:t>
+            </a:r>
+            <a:r>
+              <a:rPr sz="2000" b="0" i="0">
+                <a:solidFill>
+                  <a:srgbClr val="4B4F52"/>
+                </a:solidFill>
+                <a:latin typeface="Verdana"/>
+              </a:rPr>
+              <a:t> pharmacie (féminin) · jusqu'</a:t>
+            </a:r>
+            <a:r>
+              <a:rPr sz="2000" b="1" i="0">
+                <a:solidFill>
+                  <a:srgbClr val="4B4F52"/>
+                </a:solidFill>
+                <a:latin typeface="Verdana"/>
+              </a:rPr>
+              <a:t>à l'</a:t>
+            </a:r>
+            <a:r>
+              <a:rPr sz="2000" b="0" i="0">
+                <a:solidFill>
+                  <a:srgbClr val="4B4F52"/>
+                </a:solidFill>
+                <a:latin typeface="Verdana"/>
+              </a:rPr>
+              <a:t>école (voyelle).</a:t>
             </a:r>
           </a:p>
         </p:txBody>
@@ -10366,7 +10420,43 @@
                 </a:solidFill>
                 <a:latin typeface="Verdana"/>
               </a:rPr>
-              <a:t>Deux expressions très proches, deux sens opposés. &lt;b&gt;Tout droit&lt;/b&gt; : on ne tourne pas. &lt;b&gt;À droite&lt;/b&gt; : on tourne. Dans le doute, montrer la direction avec la main et demander « comme ça ? ».</a:t>
+              <a:t>Deux expressions très proches, deux sens opposés. </a:t>
+            </a:r>
+            <a:r>
+              <a:rPr sz="2000" b="1" i="0">
+                <a:solidFill>
+                  <a:srgbClr val="4B4F52"/>
+                </a:solidFill>
+                <a:latin typeface="Verdana"/>
+              </a:rPr>
+              <a:t>Tout droit</a:t>
+            </a:r>
+            <a:r>
+              <a:rPr sz="2000" b="0" i="0">
+                <a:solidFill>
+                  <a:srgbClr val="4B4F52"/>
+                </a:solidFill>
+                <a:latin typeface="Verdana"/>
+              </a:rPr>
+              <a:t> : on ne tourne pas. </a:t>
+            </a:r>
+            <a:r>
+              <a:rPr sz="2000" b="1" i="0">
+                <a:solidFill>
+                  <a:srgbClr val="4B4F52"/>
+                </a:solidFill>
+                <a:latin typeface="Verdana"/>
+              </a:rPr>
+              <a:t>À droite</a:t>
+            </a:r>
+            <a:r>
+              <a:rPr sz="2000" b="0" i="0">
+                <a:solidFill>
+                  <a:srgbClr val="4B4F52"/>
+                </a:solidFill>
+                <a:latin typeface="Verdana"/>
+              </a:rPr>
+              <a:t> : on tourne. Dans le doute, montrer la direction avec la main et demander « comme ça ? ».</a:t>
             </a:r>
           </a:p>
         </p:txBody>
